--- a/DepGraph.pptx
+++ b/DepGraph.pptx
@@ -3343,7 +3343,7 @@
                 </a:solidFill>
                 <a:latin typeface="Calibri"/>
               </a:rPr>
-              <a:t>   ·   </a:t>
+              <a:t xml:space="preserve">   ·   </a:t>
             </a:r>
             <a:r>
               <a:rPr sz="1300" b="1">
@@ -3361,7 +3361,7 @@
                 </a:solidFill>
                 <a:latin typeface="Calibri"/>
               </a:rPr>
-              <a:t>   ·   </a:t>
+              <a:t xml:space="preserve">   ·   </a:t>
             </a:r>
             <a:r>
               <a:rPr sz="1300" b="1">
@@ -3379,7 +3379,7 @@
                 </a:solidFill>
                 <a:latin typeface="Calibri"/>
               </a:rPr>
-              <a:t>   ·   </a:t>
+              <a:t xml:space="preserve">   ·   </a:t>
             </a:r>
             <a:r>
               <a:rPr sz="1300" b="1">
@@ -6241,7 +6241,7 @@
 </file>
 
 <file path=ppt/slides/slide3.xml><?xml version="1.0" encoding="utf-8"?>
-<p:sld xmlns:a="http://schemas.openxmlformats.org/drawingml/2006/main" xmlns:p="http://schemas.openxmlformats.org/presentationml/2006/main" xmlns:r="http://schemas.openxmlformats.org/officeDocument/2006/relationships">
+<p:sld xmlns:a="http://schemas.openxmlformats.org/drawingml/2006/main" xmlns:p="http://schemas.openxmlformats.org/presentationml/2006/main">
   <p:cSld>
     <p:bg>
       <p:bgPr>
@@ -6398,7 +6398,7 @@
               </a:defRPr>
             </a:pPr>
             <a:r>
-              <a:t>Three Graph Views</a:t>
+              <a:t>Two Powerful Views</a:t>
             </a:r>
           </a:p>
         </p:txBody>
@@ -6432,7 +6432,7 @@
               </a:defRPr>
             </a:pPr>
             <a:r>
-              <a:t>Node-edge, tree, and dependency matrix</a:t>
+              <a:t>Interactive force-directed graph and dependency tree explorer</a:t>
             </a:r>
           </a:p>
         </p:txBody>
@@ -7223,7 +7223,7 @@
 </file>
 
 <file path=ppt/slides/slide4.xml><?xml version="1.0" encoding="utf-8"?>
-<p:sld xmlns:a="http://schemas.openxmlformats.org/drawingml/2006/main" xmlns:p="http://schemas.openxmlformats.org/presentationml/2006/main" xmlns:r="http://schemas.openxmlformats.org/officeDocument/2006/relationships">
+<p:sld xmlns:a="http://schemas.openxmlformats.org/drawingml/2006/main" xmlns:p="http://schemas.openxmlformats.org/presentationml/2006/main">
   <p:cSld>
     <p:bg>
       <p:bgPr>
@@ -7736,7 +7736,7 @@
               </a:defRPr>
             </a:pPr>
             <a:r>
-              <a:t>index.html + 14 JS modules + style.css</a:t>
+              <a:t>index.html + 13 JS modules + style.css</a:t>
             </a:r>
           </a:p>
         </p:txBody>
@@ -7776,7 +7776,7 @@
                 </a:solidFill>
                 <a:latin typeface="Calibri"/>
               </a:rPr>
-              <a:t>14-module SPA with floating UI panels</a:t>
+              <a:t>13-module SPA with floating UI panels</a:t>
             </a:r>
           </a:p>
           <a:p>
@@ -7793,7 +7793,7 @@
                 </a:solidFill>
                 <a:latin typeface="Calibri"/>
               </a:rPr>
-              <a:t>Three views: graph, tree, matrix</a:t>
+              <a:t>Two views: graph and tree</a:t>
             </a:r>
           </a:p>
           <a:p>
@@ -9181,7 +9181,7 @@
                 </a:solidFill>
                 <a:latin typeface="Consolas"/>
               </a:rPr>
-              <a:t>    r'#include\s*(&lt;|")([^&gt;"]+)(&gt;|")')</a:t>
+              <a:t xml:space="preserve">    r'#include\s*(&lt;|")([^&gt;"]+)(&gt;|")')</a:t>
             </a:r>
           </a:p>
           <a:p>
@@ -9245,7 +9245,7 @@
                 </a:solidFill>
                 <a:latin typeface="Consolas"/>
               </a:rPr>
-              <a:t>    r'import\s+.*?from\s+[\'"](.+?)[\'"]'</a:t>
+              <a:t xml:space="preserve">    r'import\s+.*?from\s+[\'"](.+?)[\'"]'</a:t>
             </a:r>
           </a:p>
           <a:p>
@@ -9261,7 +9261,7 @@
                 </a:solidFill>
                 <a:latin typeface="Consolas"/>
               </a:rPr>
-              <a:t>    r'|require\s*\(\s*[\'"](.+?)[\'"]')</a:t>
+              <a:t xml:space="preserve">    r'|require\s*\(\s*[\'"](.+?)[\'"]')</a:t>
             </a:r>
           </a:p>
           <a:p>
@@ -9325,7 +9325,7 @@
                 </a:solidFill>
                 <a:latin typeface="Consolas"/>
               </a:rPr>
-              <a:t>    r'^from\s+(.+?)\s+import', re.MULTILINE)</a:t>
+              <a:t xml:space="preserve">    r'^from\s+(.+?)\s+import', re.MULTILINE)</a:t>
             </a:r>
           </a:p>
         </p:txBody>
@@ -9850,7 +9850,7 @@
                 </a:solidFill>
                 <a:latin typeface="Consolas"/>
               </a:rPr>
-              <a:t>    nodes, edges, node_set = [], [], set()</a:t>
+              <a:t xml:space="preserve">    nodes, edges, node_set = [], [], set()</a:t>
             </a:r>
           </a:p>
           <a:p>
@@ -9866,7 +9866,7 @@
                 </a:solidFill>
                 <a:latin typeface="Consolas"/>
               </a:rPr>
-              <a:t>    files_to_parse = _collect_source_files(...)</a:t>
+              <a:t xml:space="preserve">    files_to_parse = _collect_source_files(...)</a:t>
             </a:r>
           </a:p>
           <a:p>
@@ -9882,7 +9882,7 @@
                 </a:solidFill>
                 <a:latin typeface="Consolas"/>
               </a:rPr>
-              <a:t>    known_files = {</a:t>
+              <a:t xml:space="preserve">    known_files = {</a:t>
             </a:r>
           </a:p>
           <a:p>
@@ -9898,7 +9898,7 @@
                 </a:solidFill>
                 <a:latin typeface="Consolas"/>
               </a:rPr>
-              <a:t>        os.path.relpath(fp, directory)</a:t>
+              <a:t xml:space="preserve">        os.path.relpath(fp, directory)</a:t>
             </a:r>
           </a:p>
           <a:p>
@@ -9914,7 +9914,7 @@
                 </a:solidFill>
                 <a:latin typeface="Consolas"/>
               </a:rPr>
-              <a:t>        for fp in files_to_parse</a:t>
+              <a:t xml:space="preserve">        for fp in files_to_parse</a:t>
             </a:r>
           </a:p>
           <a:p>
@@ -9930,7 +9930,7 @@
                 </a:solidFill>
                 <a:latin typeface="Consolas"/>
               </a:rPr>
-              <a:t>    }</a:t>
+              <a:t xml:space="preserve">    }</a:t>
             </a:r>
           </a:p>
           <a:p>
@@ -9962,7 +9962,7 @@
                 </a:solidFill>
                 <a:latin typeface="Consolas"/>
               </a:rPr>
-              <a:t>    def _add_edge(source, target):</a:t>
+              <a:t xml:space="preserve">    def _add_edge(source, target):</a:t>
             </a:r>
           </a:p>
           <a:p>
@@ -9978,7 +9978,7 @@
                 </a:solidFill>
                 <a:latin typeface="Consolas"/>
               </a:rPr>
-              <a:t>        edges.append({</a:t>
+              <a:t xml:space="preserve">        edges.append({</a:t>
             </a:r>
           </a:p>
           <a:p>
@@ -9994,7 +9994,7 @@
                 </a:solidFill>
                 <a:latin typeface="Consolas"/>
               </a:rPr>
-              <a:t>            "data": {"source": source, "target": target}</a:t>
+              <a:t xml:space="preserve">            "data": {"source": source, "target": target}</a:t>
             </a:r>
           </a:p>
           <a:p>
@@ -10010,7 +10010,7 @@
                 </a:solidFill>
                 <a:latin typeface="Consolas"/>
               </a:rPr>
-              <a:t>        })</a:t>
+              <a:t xml:space="preserve">        })</a:t>
             </a:r>
           </a:p>
           <a:p>
@@ -10026,7 +10026,7 @@
                 </a:solidFill>
                 <a:latin typeface="Consolas"/>
               </a:rPr>
-              <a:t>        if target not in node_set:</a:t>
+              <a:t xml:space="preserve">        if target not in node_set:</a:t>
             </a:r>
           </a:p>
           <a:p>
@@ -10042,7 +10042,7 @@
                 </a:solidFill>
                 <a:latin typeface="Consolas"/>
               </a:rPr>
-              <a:t>            nodes.append({</a:t>
+              <a:t xml:space="preserve">            nodes.append({</a:t>
             </a:r>
           </a:p>
           <a:p>
@@ -10058,7 +10058,7 @@
                 </a:solidFill>
                 <a:latin typeface="Consolas"/>
               </a:rPr>
-              <a:t>                "data": {</a:t>
+              <a:t xml:space="preserve">                "data": {</a:t>
             </a:r>
           </a:p>
           <a:p>
@@ -10074,7 +10074,7 @@
                 </a:solidFill>
                 <a:latin typeface="Consolas"/>
               </a:rPr>
-              <a:t>                    "id": target,</a:t>
+              <a:t xml:space="preserve">                    "id": target,</a:t>
             </a:r>
           </a:p>
           <a:p>
@@ -10090,7 +10090,7 @@
                 </a:solidFill>
                 <a:latin typeface="Consolas"/>
               </a:rPr>
-              <a:t>                    "color": _color_for_path(target)</a:t>
+              <a:t xml:space="preserve">                    "color": _color_for_path(target)</a:t>
             </a:r>
           </a:p>
           <a:p>
@@ -10106,7 +10106,7 @@
                 </a:solidFill>
                 <a:latin typeface="Consolas"/>
               </a:rPr>
-              <a:t>                }</a:t>
+              <a:t xml:space="preserve">                }</a:t>
             </a:r>
           </a:p>
           <a:p>
@@ -10122,7 +10122,7 @@
                 </a:solidFill>
                 <a:latin typeface="Consolas"/>
               </a:rPr>
-              <a:t>            })</a:t>
+              <a:t xml:space="preserve">            })</a:t>
             </a:r>
           </a:p>
           <a:p>
@@ -10138,7 +10138,7 @@
                 </a:solidFill>
                 <a:latin typeface="Consolas"/>
               </a:rPr>
-              <a:t>            node_set.add(target)</a:t>
+              <a:t xml:space="preserve">            node_set.add(target)</a:t>
             </a:r>
           </a:p>
         </p:txBody>
@@ -10663,7 +10663,7 @@
                 </a:solidFill>
                 <a:latin typeface="Consolas"/>
               </a:rPr>
-              <a:t>    index_counter = [0]</a:t>
+              <a:t xml:space="preserve">    index_counter = [0]</a:t>
             </a:r>
           </a:p>
           <a:p>
@@ -10679,7 +10679,7 @@
                 </a:solidFill>
                 <a:latin typeface="Consolas"/>
               </a:rPr>
-              <a:t>    stack, indices, lowlinks = [], {}, {}</a:t>
+              <a:t xml:space="preserve">    stack, indices, lowlinks = [], {}, {}</a:t>
             </a:r>
           </a:p>
           <a:p>
@@ -10695,7 +10695,7 @@
                 </a:solidFill>
                 <a:latin typeface="Consolas"/>
               </a:rPr>
-              <a:t>    on_stack, sccs = set(), []</a:t>
+              <a:t xml:space="preserve">    on_stack, sccs = set(), []</a:t>
             </a:r>
           </a:p>
           <a:p>
@@ -10727,7 +10727,7 @@
                 </a:solidFill>
                 <a:latin typeface="Consolas"/>
               </a:rPr>
-              <a:t>    def strongconnect(v):</a:t>
+              <a:t xml:space="preserve">    def strongconnect(v):</a:t>
             </a:r>
           </a:p>
           <a:p>
@@ -10743,7 +10743,7 @@
                 </a:solidFill>
                 <a:latin typeface="Consolas"/>
               </a:rPr>
-              <a:t>        indices[v] = lowlinks[v] = index_counter[0]</a:t>
+              <a:t xml:space="preserve">        indices[v] = lowlinks[v] = index_counter[0]</a:t>
             </a:r>
           </a:p>
           <a:p>
@@ -10759,7 +10759,7 @@
                 </a:solidFill>
                 <a:latin typeface="Consolas"/>
               </a:rPr>
-              <a:t>        index_counter[0] += 1</a:t>
+              <a:t xml:space="preserve">        index_counter[0] += 1</a:t>
             </a:r>
           </a:p>
           <a:p>
@@ -10775,7 +10775,7 @@
                 </a:solidFill>
                 <a:latin typeface="Consolas"/>
               </a:rPr>
-              <a:t>        stack.append(v); on_stack.add(v)</a:t>
+              <a:t xml:space="preserve">        stack.append(v); on_stack.add(v)</a:t>
             </a:r>
           </a:p>
           <a:p>
@@ -10807,7 +10807,7 @@
                 </a:solidFill>
                 <a:latin typeface="Consolas"/>
               </a:rPr>
-              <a:t>        for w in adj.get(v, []):</a:t>
+              <a:t xml:space="preserve">        for w in adj.get(v, []):</a:t>
             </a:r>
           </a:p>
           <a:p>
@@ -10823,7 +10823,7 @@
                 </a:solidFill>
                 <a:latin typeface="Consolas"/>
               </a:rPr>
-              <a:t>            if w not in indices:</a:t>
+              <a:t xml:space="preserve">            if w not in indices:</a:t>
             </a:r>
           </a:p>
           <a:p>
@@ -10839,7 +10839,7 @@
                 </a:solidFill>
                 <a:latin typeface="Consolas"/>
               </a:rPr>
-              <a:t>                strongconnect(w)</a:t>
+              <a:t xml:space="preserve">                strongconnect(w)</a:t>
             </a:r>
           </a:p>
           <a:p>
@@ -10855,7 +10855,7 @@
                 </a:solidFill>
                 <a:latin typeface="Consolas"/>
               </a:rPr>
-              <a:t>                lowlinks[v] = min(</a:t>
+              <a:t xml:space="preserve">                lowlinks[v] = min(</a:t>
             </a:r>
           </a:p>
           <a:p>
@@ -10871,7 +10871,7 @@
                 </a:solidFill>
                 <a:latin typeface="Consolas"/>
               </a:rPr>
-              <a:t>                    lowlinks[v], lowlinks[w])</a:t>
+              <a:t xml:space="preserve">                    lowlinks[v], lowlinks[w])</a:t>
             </a:r>
           </a:p>
           <a:p>
@@ -10887,7 +10887,7 @@
                 </a:solidFill>
                 <a:latin typeface="Consolas"/>
               </a:rPr>
-              <a:t>            elif w in on_stack:</a:t>
+              <a:t xml:space="preserve">            elif w in on_stack:</a:t>
             </a:r>
           </a:p>
           <a:p>
@@ -10903,7 +10903,7 @@
                 </a:solidFill>
                 <a:latin typeface="Consolas"/>
               </a:rPr>
-              <a:t>                lowlinks[v] = min(</a:t>
+              <a:t xml:space="preserve">                lowlinks[v] = min(</a:t>
             </a:r>
           </a:p>
           <a:p>
@@ -10919,7 +10919,7 @@
                 </a:solidFill>
                 <a:latin typeface="Consolas"/>
               </a:rPr>
-              <a:t>                    lowlinks[v], indices[w])</a:t>
+              <a:t xml:space="preserve">                    lowlinks[v], indices[w])</a:t>
             </a:r>
           </a:p>
           <a:p>
@@ -10951,7 +10951,7 @@
                 </a:solidFill>
                 <a:latin typeface="Consolas"/>
               </a:rPr>
-              <a:t>        if lowlinks[v] == indices[v]:</a:t>
+              <a:t xml:space="preserve">        if lowlinks[v] == indices[v]:</a:t>
             </a:r>
           </a:p>
           <a:p>
@@ -10967,7 +10967,7 @@
                 </a:solidFill>
                 <a:latin typeface="Consolas"/>
               </a:rPr>
-              <a:t>            scc = []</a:t>
+              <a:t xml:space="preserve">            scc = []</a:t>
             </a:r>
           </a:p>
           <a:p>
@@ -10983,7 +10983,7 @@
                 </a:solidFill>
                 <a:latin typeface="Consolas"/>
               </a:rPr>
-              <a:t>            while True:</a:t>
+              <a:t xml:space="preserve">            while True:</a:t>
             </a:r>
           </a:p>
           <a:p>
@@ -10999,7 +10999,7 @@
                 </a:solidFill>
                 <a:latin typeface="Consolas"/>
               </a:rPr>
-              <a:t>                w = stack.pop()</a:t>
+              <a:t xml:space="preserve">                w = stack.pop()</a:t>
             </a:r>
           </a:p>
           <a:p>
@@ -11015,7 +11015,7 @@
                 </a:solidFill>
                 <a:latin typeface="Consolas"/>
               </a:rPr>
-              <a:t>                on_stack.remove(w)</a:t>
+              <a:t xml:space="preserve">                on_stack.remove(w)</a:t>
             </a:r>
           </a:p>
           <a:p>
@@ -11031,7 +11031,7 @@
                 </a:solidFill>
                 <a:latin typeface="Consolas"/>
               </a:rPr>
-              <a:t>                scc.append(w)</a:t>
+              <a:t xml:space="preserve">                scc.append(w)</a:t>
             </a:r>
           </a:p>
           <a:p>
@@ -11047,7 +11047,7 @@
                 </a:solidFill>
                 <a:latin typeface="Consolas"/>
               </a:rPr>
-              <a:t>                if w == v: break</a:t>
+              <a:t xml:space="preserve">                if w == v: break</a:t>
             </a:r>
           </a:p>
           <a:p>
@@ -11063,7 +11063,7 @@
                 </a:solidFill>
                 <a:latin typeface="Consolas"/>
               </a:rPr>
-              <a:t>            sccs.append(scc)</a:t>
+              <a:t xml:space="preserve">            sccs.append(scc)</a:t>
             </a:r>
           </a:p>
         </p:txBody>
@@ -11539,7 +11539,7 @@
 </file>
 
 <file path=ppt/slides/slide8.xml><?xml version="1.0" encoding="utf-8"?>
-<p:sld xmlns:a="http://schemas.openxmlformats.org/drawingml/2006/main" xmlns:p="http://schemas.openxmlformats.org/presentationml/2006/main" xmlns:r="http://schemas.openxmlformats.org/officeDocument/2006/relationships">
+<p:sld xmlns:a="http://schemas.openxmlformats.org/drawingml/2006/main" xmlns:p="http://schemas.openxmlformats.org/presentationml/2006/main">
   <p:cSld>
     <p:bg>
       <p:bgPr>
@@ -11619,7 +11619,7 @@
               </a:defRPr>
             </a:pPr>
             <a:r>
-              <a:t>CYTOSCAPE.JS + THREE LAYOUTS + THREE VIEWS</a:t>
+              <a:t>CYTOSCAPE.JS + FORCE LAYOUT + TWO VIEWS</a:t>
             </a:r>
           </a:p>
         </p:txBody>
@@ -11717,7 +11717,7 @@
                 </a:solidFill>
                 <a:latin typeface="Consolas"/>
               </a:rPr>
-              <a:t>  container: document.getElementById('cy'),</a:t>
+              <a:t xml:space="preserve">  container: document.getElementById('cy'),</a:t>
             </a:r>
           </a:p>
           <a:p>
@@ -11733,7 +11733,7 @@
                 </a:solidFill>
                 <a:latin typeface="Consolas"/>
               </a:rPr>
-              <a:t>  elements: {</a:t>
+              <a:t xml:space="preserve">  elements: {</a:t>
             </a:r>
           </a:p>
           <a:p>
@@ -11749,7 +11749,7 @@
                 </a:solidFill>
                 <a:latin typeface="Consolas"/>
               </a:rPr>
-              <a:t>    nodes: data.nodes,</a:t>
+              <a:t xml:space="preserve">    nodes: data.nodes,</a:t>
             </a:r>
           </a:p>
           <a:p>
@@ -11765,7 +11765,7 @@
                 </a:solidFill>
                 <a:latin typeface="Consolas"/>
               </a:rPr>
-              <a:t>    edges: data.edges</a:t>
+              <a:t xml:space="preserve">    edges: data.edges</a:t>
             </a:r>
           </a:p>
           <a:p>
@@ -11781,7 +11781,7 @@
                 </a:solidFill>
                 <a:latin typeface="Consolas"/>
               </a:rPr>
-              <a:t>  },</a:t>
+              <a:t xml:space="preserve">  },</a:t>
             </a:r>
           </a:p>
           <a:p>
@@ -11797,7 +11797,7 @@
                 </a:solidFill>
                 <a:latin typeface="Consolas"/>
               </a:rPr>
-              <a:t>  style: [{</a:t>
+              <a:t xml:space="preserve">  style: [{</a:t>
             </a:r>
           </a:p>
           <a:p>
@@ -11813,7 +11813,7 @@
                 </a:solidFill>
                 <a:latin typeface="Consolas"/>
               </a:rPr>
-              <a:t>    selector: 'node',</a:t>
+              <a:t xml:space="preserve">    selector: 'node',</a:t>
             </a:r>
           </a:p>
           <a:p>
@@ -11829,7 +11829,7 @@
                 </a:solidFill>
                 <a:latin typeface="Consolas"/>
               </a:rPr>
-              <a:t>    style: {</a:t>
+              <a:t xml:space="preserve">    style: {</a:t>
             </a:r>
           </a:p>
           <a:p>
@@ -11845,7 +11845,7 @@
                 </a:solidFill>
                 <a:latin typeface="Consolas"/>
               </a:rPr>
-              <a:t>      'background-color': 'data(color)',</a:t>
+              <a:t xml:space="preserve">      'background-color': 'data(color)',</a:t>
             </a:r>
           </a:p>
           <a:p>
@@ -11861,7 +11861,7 @@
                 </a:solidFill>
                 <a:latin typeface="Consolas"/>
               </a:rPr>
-              <a:t>      'width': 'data(size)',</a:t>
+              <a:t xml:space="preserve">      'width': 'data(size)',</a:t>
             </a:r>
           </a:p>
           <a:p>
@@ -11877,7 +11877,7 @@
                 </a:solidFill>
                 <a:latin typeface="Consolas"/>
               </a:rPr>
-              <a:t>      'height': 'data(size)'</a:t>
+              <a:t xml:space="preserve">      'height': 'data(size)'</a:t>
             </a:r>
           </a:p>
           <a:p>
@@ -11893,7 +11893,7 @@
                 </a:solidFill>
                 <a:latin typeface="Consolas"/>
               </a:rPr>
-              <a:t>    }</a:t>
+              <a:t xml:space="preserve">    }</a:t>
             </a:r>
           </a:p>
           <a:p>
@@ -11909,7 +11909,7 @@
                 </a:solidFill>
                 <a:latin typeface="Consolas"/>
               </a:rPr>
-              <a:t>  }, {</a:t>
+              <a:t xml:space="preserve">  }, {</a:t>
             </a:r>
           </a:p>
           <a:p>
@@ -11925,7 +11925,7 @@
                 </a:solidFill>
                 <a:latin typeface="Consolas"/>
               </a:rPr>
-              <a:t>    selector: 'edge.cyclic',</a:t>
+              <a:t xml:space="preserve">    selector: 'edge.cyclic',</a:t>
             </a:r>
           </a:p>
           <a:p>
@@ -11941,7 +11941,7 @@
                 </a:solidFill>
                 <a:latin typeface="Consolas"/>
               </a:rPr>
-              <a:t>    style: {</a:t>
+              <a:t xml:space="preserve">    style: {</a:t>
             </a:r>
           </a:p>
           <a:p>
@@ -11957,7 +11957,7 @@
                 </a:solidFill>
                 <a:latin typeface="Consolas"/>
               </a:rPr>
-              <a:t>      'line-color': '#EF4444',</a:t>
+              <a:t xml:space="preserve">      'line-color': '#EF4444',</a:t>
             </a:r>
           </a:p>
           <a:p>
@@ -11973,7 +11973,7 @@
                 </a:solidFill>
                 <a:latin typeface="Consolas"/>
               </a:rPr>
-              <a:t>      'width': 2</a:t>
+              <a:t xml:space="preserve">      'width': 2</a:t>
             </a:r>
           </a:p>
           <a:p>
@@ -11989,7 +11989,7 @@
                 </a:solidFill>
                 <a:latin typeface="Consolas"/>
               </a:rPr>
-              <a:t>    }</a:t>
+              <a:t xml:space="preserve">    }</a:t>
             </a:r>
           </a:p>
           <a:p>
@@ -12005,7 +12005,7 @@
                 </a:solidFill>
                 <a:latin typeface="Consolas"/>
               </a:rPr>
-              <a:t>  }],</a:t>
+              <a:t xml:space="preserve">  }],</a:t>
             </a:r>
           </a:p>
           <a:p>
@@ -12021,7 +12021,7 @@
                 </a:solidFill>
                 <a:latin typeface="Consolas"/>
               </a:rPr>
-              <a:t>  layout: {</a:t>
+              <a:t xml:space="preserve">  layout: {</a:t>
             </a:r>
           </a:p>
           <a:p>
@@ -12037,7 +12037,7 @@
                 </a:solidFill>
                 <a:latin typeface="Consolas"/>
               </a:rPr>
-              <a:t>    name: 'dagre', rankDir: 'TB'</a:t>
+              <a:t xml:space="preserve">    name: 'cose', nodeRepulsion: () =&gt; 80000000</a:t>
             </a:r>
           </a:p>
           <a:p>
@@ -12053,7 +12053,7 @@
                 </a:solidFill>
                 <a:latin typeface="Consolas"/>
               </a:rPr>
-              <a:t>  }</a:t>
+              <a:t xml:space="preserve">  }</a:t>
             </a:r>
           </a:p>
           <a:p>
@@ -12180,7 +12180,7 @@
               </a:defRPr>
             </a:pPr>
             <a:r>
-              <a:t>Battle-tested graph library. Three views: node-edge graph, tree, and dependency matrix.</a:t>
+              <a:t>Battle-tested graph library. Two views: interactive graph and dependency tree.</a:t>
             </a:r>
           </a:p>
         </p:txBody>
@@ -12257,7 +12257,7 @@
               </a:defRPr>
             </a:pPr>
             <a:r>
-              <a:t>Three Layouts</a:t>
+              <a:t>Force Layout + Focus Lens</a:t>
             </a:r>
           </a:p>
         </p:txBody>
@@ -12291,7 +12291,7 @@
               </a:defRPr>
             </a:pPr>
             <a:r>
-              <a:t>Force-directed, hierarchical (dagre), and concentric. Auto-arranges with loading transitions.</a:t>
+              <a:t>Force-directed layout with zoom-aware focus lens that magnifies nodes on hover, scaling with zoom level.</a:t>
             </a:r>
           </a:p>
         </p:txBody>
@@ -12368,7 +12368,7 @@
               </a:defRPr>
             </a:pPr>
             <a:r>
-              <a:t>14-Module SPA</a:t>
+              <a:t>13-Module SPA</a:t>
             </a:r>
           </a:p>
         </p:txBody>
@@ -12402,7 +12402,7 @@
               </a:defRPr>
             </a:pPr>
             <a:r>
-              <a:t>graph-core, views, ui, tools, analysis, exports, query, simulation, story, state, tour, timeline, demo-graph, app. CDN: Cytoscape, dagre, Prism.js, Inter font.</a:t>
+              <a:t>graph-core, views, ui, tools, analysis, exports, query, simulation, story, state, tour, timeline, app. CDN: Cytoscape, dagre, Prism.js, Inter font.</a:t>
             </a:r>
           </a:p>
         </p:txBody>
@@ -12637,7 +12637,7 @@
                 </a:solidFill>
                 <a:latin typeface="Consolas"/>
               </a:rPr>
-              <a:t>  ?dir=./src</a:t>
+              <a:t xml:space="preserve">  ?dir=./src</a:t>
             </a:r>
           </a:p>
           <a:p>
@@ -12653,7 +12653,7 @@
                 </a:solidFill>
                 <a:latin typeface="Consolas"/>
               </a:rPr>
-              <a:t>  &amp;hide_system=true</a:t>
+              <a:t xml:space="preserve">  &amp;hide_system=true</a:t>
             </a:r>
           </a:p>
           <a:p>
@@ -12669,7 +12669,7 @@
                 </a:solidFill>
                 <a:latin typeface="Consolas"/>
               </a:rPr>
-              <a:t>  &amp;show_c=true  &amp;show_h=true</a:t>
+              <a:t xml:space="preserve">  &amp;show_c=true  &amp;show_h=true</a:t>
             </a:r>
           </a:p>
           <a:p>
@@ -12685,7 +12685,7 @@
                 </a:solidFill>
                 <a:latin typeface="Consolas"/>
               </a:rPr>
-              <a:t>  &amp;show_js=false &amp;show_cpp=false</a:t>
+              <a:t xml:space="preserve">  &amp;show_js=false &amp;show_cpp=false</a:t>
             </a:r>
           </a:p>
           <a:p>
@@ -12701,7 +12701,7 @@
                 </a:solidFill>
                 <a:latin typeface="Consolas"/>
               </a:rPr>
-              <a:t>  &amp;hide_isolated=false</a:t>
+              <a:t xml:space="preserve">  &amp;hide_isolated=false</a:t>
             </a:r>
           </a:p>
           <a:p>
@@ -12717,7 +12717,7 @@
                 </a:solidFill>
                 <a:latin typeface="Consolas"/>
               </a:rPr>
-              <a:t>  &amp;filter_dir=src/core</a:t>
+              <a:t xml:space="preserve">  &amp;filter_dir=src/core</a:t>
             </a:r>
           </a:p>
           <a:p>
@@ -12797,7 +12797,7 @@
                 </a:solidFill>
                 <a:latin typeface="Consolas"/>
               </a:rPr>
-              <a:t>  file: &lt;ZIP archive or source file&gt;</a:t>
+              <a:t xml:space="preserve">  file: &lt;ZIP archive or source file&gt;</a:t>
             </a:r>
           </a:p>
           <a:p>
@@ -12813,7 +12813,7 @@
                 </a:solidFill>
                 <a:latin typeface="Consolas"/>
               </a:rPr>
-              <a:t>  + same filter params as GET</a:t>
+              <a:t xml:space="preserve">  + same filter params as GET</a:t>
             </a:r>
           </a:p>
         </p:txBody>
@@ -12891,7 +12891,7 @@
                 </a:solidFill>
                 <a:latin typeface="Calibri"/>
               </a:rPr>
-              <a:t>  Array of {id, color, size}</a:t>
+              <a:t xml:space="preserve">  Array of {id, color, size}</a:t>
             </a:r>
           </a:p>
         </p:txBody>
@@ -12935,7 +12935,7 @@
                 </a:solidFill>
                 <a:latin typeface="Calibri"/>
               </a:rPr>
-              <a:t>  Array of {source, target, color}</a:t>
+              <a:t xml:space="preserve">  Array of {source, target, color}</a:t>
             </a:r>
           </a:p>
         </p:txBody>
@@ -12979,7 +12979,7 @@
                 </a:solidFill>
                 <a:latin typeface="Calibri"/>
               </a:rPr>
-              <a:t>  Boolean — true if SCC &gt; 1</a:t>
+              <a:t xml:space="preserve">  Boolean — true if SCC &gt; 1</a:t>
             </a:r>
           </a:p>
         </p:txBody>
@@ -13023,7 +13023,7 @@
                 </a:solidFill>
                 <a:latin typeface="Calibri"/>
               </a:rPr>
-              <a:t>  Array of cycle member arrays</a:t>
+              <a:t xml:space="preserve">  Array of cycle member arrays</a:t>
             </a:r>
           </a:p>
         </p:txBody>

--- a/DepGraph.pptx
+++ b/DepGraph.pptx
@@ -13,6 +13,7 @@
     <p:sldId id="261" r:id="rId12"/>
     <p:sldId id="262" r:id="rId13"/>
     <p:sldId id="263" r:id="rId14"/>
+    <p:sldId id="268" r:id="rId19"/>
     <p:sldId id="264" r:id="rId15"/>
     <p:sldId id="265" r:id="rId16"/>
     <p:sldId id="266" r:id="rId17"/>
@@ -4579,7 +4580,7 @@
                 </a:solidFill>
                 <a:latin typeface="Calibri"/>
               </a:rPr>
-              <a:t>Pan, zoom, minimap, focus lens</a:t>
+              <a:t>Pan, zoom, minimap, responsive toolbar</a:t>
             </a:r>
           </a:p>
           <a:p>
@@ -4596,7 +4597,7 @@
                 </a:solidFill>
                 <a:latin typeface="Calibri"/>
               </a:rPr>
-              <a:t>Simulation, story mode, layering rules</a:t>
+              <a:t>Guided tour, timeline, insights, layers architecture</a:t>
             </a:r>
           </a:p>
         </p:txBody>
@@ -5650,6 +5651,661 @@
 </p:sld>
 </file>
 
+<file path=ppt/slides/slide13.xml><?xml version="1.0" encoding="utf-8"?>
+<p:sld xmlns:a="http://schemas.openxmlformats.org/drawingml/2006/main" xmlns:p="http://schemas.openxmlformats.org/presentationml/2006/main">
+  <p:cSld>
+    <p:bg>
+      <p:bgPr>
+        <a:solidFill>
+          <a:srgbClr val="0F172A"/>
+        </a:solidFill>
+        <a:effectLst/>
+      </p:bgPr>
+    </p:bg>
+    <p:spTree>
+      <p:nvGrpSpPr>
+        <p:cNvPr id="1" name=""/>
+        <p:cNvGrpSpPr/>
+        <p:nvPr/>
+      </p:nvGrpSpPr>
+      <p:grpSpPr/>
+      <p:sp>
+        <p:nvSpPr>
+          <p:cNvPr id="2" name="TextBox 1"/>
+          <p:cNvSpPr txBox="1"/>
+          <p:nvPr/>
+        </p:nvSpPr>
+        <p:spPr>
+          <a:xfrm>
+            <a:off x="640080" y="320040"/>
+            <a:ext cx="7315200" cy="502920"/>
+          </a:xfrm>
+          <a:prstGeom prst="rect">
+            <a:avLst/>
+          </a:prstGeom>
+          <a:noFill/>
+        </p:spPr>
+        <p:txBody>
+          <a:bodyPr wrap="square"/>
+          <a:lstStyle/>
+          <a:p>
+            <a:pPr algn="l">
+              <a:defRPr sz="3200" b="1">
+                <a:solidFill>
+                  <a:srgbClr val="F8FAFC"/>
+                </a:solidFill>
+                <a:latin typeface="Calibri"/>
+              </a:defRPr>
+            </a:pPr>
+            <a:r>
+              <a:t>Layers Architecture View</a:t>
+            </a:r>
+          </a:p>
+        </p:txBody>
+      </p:sp>
+      <p:sp>
+        <p:nvSpPr>
+          <p:cNvPr id="3" name="TextBox 2"/>
+          <p:cNvSpPr txBox="1"/>
+          <p:nvPr/>
+        </p:nvSpPr>
+        <p:spPr>
+          <a:xfrm>
+            <a:off x="640080" y="822960"/>
+            <a:ext cx="7315200" cy="320040"/>
+          </a:xfrm>
+          <a:prstGeom prst="rect">
+            <a:avLst/>
+          </a:prstGeom>
+          <a:noFill/>
+        </p:spPr>
+        <p:txBody>
+          <a:bodyPr wrap="square"/>
+          <a:lstStyle/>
+          <a:p>
+            <a:pPr algn="l">
+              <a:defRPr sz="1100" b="0">
+                <a:solidFill>
+                  <a:srgbClr val="06B6D4"/>
+                </a:solidFill>
+                <a:latin typeface="Calibri"/>
+              </a:defRPr>
+            </a:pPr>
+            <a:r>
+              <a:t>SWIM-LANE LAYOUT + VIOLATION DETECTION + DRAG SIMULATION</a:t>
+            </a:r>
+          </a:p>
+        </p:txBody>
+      </p:sp>
+      <p:sp>
+        <p:nvSpPr>
+          <p:cNvPr id="4" name="Rounded Rectangle 3"/>
+          <p:cNvSpPr/>
+          <p:nvPr/>
+        </p:nvSpPr>
+        <p:spPr>
+          <a:xfrm>
+            <a:off x="640080" y="1325880"/>
+            <a:ext cx="4389120" cy="3520440"/>
+          </a:xfrm>
+          <a:prstGeom prst="roundRect">
+            <a:avLst/>
+          </a:prstGeom>
+          <a:solidFill>
+            <a:srgbClr val="0B0E17"/>
+          </a:solidFill>
+          <a:ln>
+            <a:noFill/>
+          </a:ln>
+        </p:spPr>
+        <p:style>
+          <a:lnRef idx="1">
+            <a:schemeClr val="accent1"/>
+          </a:lnRef>
+          <a:fillRef idx="3">
+            <a:schemeClr val="accent1"/>
+          </a:fillRef>
+          <a:effectRef idx="2">
+            <a:schemeClr val="accent1"/>
+          </a:effectRef>
+          <a:fontRef idx="minor">
+            <a:schemeClr val="lt1"/>
+          </a:fontRef>
+        </p:style>
+        <p:txBody>
+          <a:bodyPr rtlCol="0" anchor="ctr"/>
+          <a:lstStyle/>
+          <a:p>
+            <a:pPr algn="ctr"/>
+          </a:p>
+        </p:txBody>
+      </p:sp>
+      <p:sp>
+        <p:nvSpPr>
+          <p:cNvPr id="5" name="TextBox 4"/>
+          <p:cNvSpPr txBox="1"/>
+          <p:nvPr/>
+        </p:nvSpPr>
+        <p:spPr>
+          <a:xfrm>
+            <a:off x="777240" y="1435608"/>
+            <a:ext cx="4114800" cy="3300984"/>
+          </a:xfrm>
+          <a:prstGeom prst="rect">
+            <a:avLst/>
+          </a:prstGeom>
+          <a:noFill/>
+        </p:spPr>
+        <p:txBody>
+          <a:bodyPr wrap="square">
+            <a:spAutoFit/>
+          </a:bodyPr>
+          <a:lstStyle/>
+          <a:p>
+            <a:pPr>
+              <a:spcAft>
+                <a:spcPts val="100"/>
+              </a:spcAft>
+            </a:pPr>
+            <a:r>
+              <a:rPr sz="850">
+                <a:solidFill>
+                  <a:srgbClr val="A5F3FC"/>
+                </a:solidFill>
+                <a:latin typeface="Consolas"/>
+              </a:rPr>
+              <a:t>// Define custom architecture layers:</a:t>
+            </a:r>
+          </a:p>
+          <a:p>
+            <a:pPr>
+              <a:spcAft>
+                <a:spcPts val="100"/>
+              </a:spcAft>
+            </a:pPr>
+            <a:r>
+              <a:rPr sz="850">
+                <a:solidFill>
+                  <a:srgbClr val="A5F3FC"/>
+                </a:solidFill>
+                <a:latin typeface="Consolas"/>
+              </a:rPr>
+              <a:t xml:space="preserve">ui, service, data, util</a:t>
+            </a:r>
+          </a:p>
+          <a:p>
+            <a:pPr>
+              <a:spcAft>
+                <a:spcPts val="100"/>
+              </a:spcAft>
+            </a:pPr>
+            <a:r>
+              <a:rPr sz="850">
+                <a:solidFill>
+                  <a:srgbClr val="A5F3FC"/>
+                </a:solidFill>
+                <a:latin typeface="Consolas"/>
+              </a:rPr>
+              <a:t xml:space="preserve">
+// Auto-detection by dependency depth:</a:t>
+            </a:r>
+          </a:p>
+          <a:p>
+            <a:pPr>
+              <a:spcAft>
+                <a:spcPts val="100"/>
+              </a:spcAft>
+            </a:pPr>
+            <a:r>
+              <a:rPr sz="850">
+                <a:solidFill>
+                  <a:srgbClr val="A5F3FC"/>
+                </a:solidFill>
+                <a:latin typeface="Consolas"/>
+              </a:rPr>
+              <a:t xml:space="preserve">L0  Entry points (app.js, main.py)</a:t>
+            </a:r>
+          </a:p>
+          <a:p>
+            <a:pPr>
+              <a:spcAft>
+                <a:spcPts val="100"/>
+              </a:spcAft>
+            </a:pPr>
+            <a:r>
+              <a:rPr sz="850">
+                <a:solidFill>
+                  <a:srgbClr val="A5F3FC"/>
+                </a:solidFill>
+                <a:latin typeface="Consolas"/>
+              </a:rPr>
+              <a:t xml:space="preserve">L1  Service modules</a:t>
+            </a:r>
+          </a:p>
+          <a:p>
+            <a:pPr>
+              <a:spcAft>
+                <a:spcPts val="100"/>
+              </a:spcAft>
+            </a:pPr>
+            <a:r>
+              <a:rPr sz="850">
+                <a:solidFill>
+                  <a:srgbClr val="A5F3FC"/>
+                </a:solidFill>
+                <a:latin typeface="Consolas"/>
+              </a:rPr>
+              <a:t xml:space="preserve">L2  Data access / utilities</a:t>
+            </a:r>
+          </a:p>
+          <a:p>
+            <a:pPr>
+              <a:spcAft>
+                <a:spcPts val="100"/>
+              </a:spcAft>
+            </a:pPr>
+            <a:r>
+              <a:rPr sz="850">
+                <a:solidFill>
+                  <a:srgbClr val="A5F3FC"/>
+                </a:solidFill>
+                <a:latin typeface="Consolas"/>
+              </a:rPr>
+              <a:t xml:space="preserve">L3  Shared helpers</a:t>
+            </a:r>
+          </a:p>
+          <a:p>
+            <a:pPr>
+              <a:spcAft>
+                <a:spcPts val="100"/>
+              </a:spcAft>
+            </a:pPr>
+            <a:r>
+              <a:rPr sz="850">
+                <a:solidFill>
+                  <a:srgbClr val="A5F3FC"/>
+                </a:solidFill>
+                <a:latin typeface="Consolas"/>
+              </a:rPr>
+              <a:t xml:space="preserve">
+// Violations: deeper -&gt; shallower</a:t>
+            </a:r>
+          </a:p>
+          <a:p>
+            <a:pPr>
+              <a:spcAft>
+                <a:spcPts val="100"/>
+              </a:spcAft>
+            </a:pPr>
+            <a:r>
+              <a:rPr sz="850">
+                <a:solidFill>
+                  <a:srgbClr val="A5F3FC"/>
+                </a:solidFill>
+                <a:latin typeface="Consolas"/>
+              </a:rPr>
+              <a:t xml:space="preserve">data/db.js -&gt; ui/App.jsx     VIOLATION</a:t>
+            </a:r>
+          </a:p>
+          <a:p>
+            <a:pPr>
+              <a:spcAft>
+                <a:spcPts val="100"/>
+              </a:spcAft>
+            </a:pPr>
+            <a:r>
+              <a:rPr sz="850">
+                <a:solidFill>
+                  <a:srgbClr val="A5F3FC"/>
+                </a:solidFill>
+                <a:latin typeface="Consolas"/>
+              </a:rPr>
+              <a:t xml:space="preserve">util/log.js -&gt; service/auth.js  VIOLATION</a:t>
+            </a:r>
+          </a:p>
+        </p:txBody>
+      </p:sp>
+      <p:sp>
+        <p:nvSpPr>
+          <p:cNvPr id="6" name="Rectangle 5"/>
+          <p:cNvSpPr/>
+          <p:nvPr/>
+        </p:nvSpPr>
+        <p:spPr>
+          <a:xfrm>
+            <a:off x="5257800" y="1417320"/>
+            <a:ext cx="73152" cy="914400"/>
+          </a:xfrm>
+          <a:prstGeom prst="rect">
+            <a:avLst/>
+          </a:prstGeom>
+          <a:solidFill>
+            <a:srgbClr val="06B6D4"/>
+          </a:solidFill>
+          <a:ln>
+            <a:noFill/>
+          </a:ln>
+        </p:spPr>
+        <p:style>
+          <a:lnRef idx="1">
+            <a:schemeClr val="accent1"/>
+          </a:lnRef>
+          <a:fillRef idx="3">
+            <a:schemeClr val="accent1"/>
+          </a:fillRef>
+          <a:effectRef idx="2">
+            <a:schemeClr val="accent1"/>
+          </a:effectRef>
+          <a:fontRef idx="minor">
+            <a:schemeClr val="lt1"/>
+          </a:fontRef>
+        </p:style>
+        <p:txBody>
+          <a:bodyPr rtlCol="0" anchor="ctr"/>
+          <a:lstStyle/>
+          <a:p>
+            <a:pPr algn="ctr"/>
+          </a:p>
+        </p:txBody>
+      </p:sp>
+      <p:sp>
+        <p:nvSpPr>
+          <p:cNvPr id="7" name="TextBox 6"/>
+          <p:cNvSpPr txBox="1"/>
+          <p:nvPr/>
+        </p:nvSpPr>
+        <p:spPr>
+          <a:xfrm>
+            <a:off x="5486400" y="1435608"/>
+            <a:ext cx="3200400" cy="274320"/>
+          </a:xfrm>
+          <a:prstGeom prst="rect">
+            <a:avLst/>
+          </a:prstGeom>
+          <a:noFill/>
+        </p:spPr>
+        <p:txBody>
+          <a:bodyPr wrap="square"/>
+          <a:lstStyle/>
+          <a:p>
+            <a:pPr algn="l">
+              <a:defRPr sz="1300" b="1">
+                <a:solidFill>
+                  <a:srgbClr val="F8FAFC"/>
+                </a:solidFill>
+                <a:latin typeface="Calibri"/>
+              </a:defRPr>
+            </a:pPr>
+            <a:r>
+              <a:t>Swim-Lane Layout</a:t>
+            </a:r>
+          </a:p>
+        </p:txBody>
+      </p:sp>
+      <p:sp>
+        <p:nvSpPr>
+          <p:cNvPr id="8" name="TextBox 7"/>
+          <p:cNvSpPr txBox="1"/>
+          <p:nvPr/>
+        </p:nvSpPr>
+        <p:spPr>
+          <a:xfrm>
+            <a:off x="5486400" y="1755648"/>
+            <a:ext cx="3200400" cy="594360"/>
+          </a:xfrm>
+          <a:prstGeom prst="rect">
+            <a:avLst/>
+          </a:prstGeom>
+          <a:noFill/>
+        </p:spPr>
+        <p:txBody>
+          <a:bodyPr wrap="square"/>
+          <a:lstStyle/>
+          <a:p>
+            <a:pPr algn="l">
+              <a:defRPr sz="1050" b="0">
+                <a:solidFill>
+                  <a:srgbClr val="BDC5D0"/>
+                </a:solidFill>
+                <a:latin typeface="Calibri"/>
+              </a:defRPr>
+            </a:pPr>
+            <a:r>
+              <a:t>Nodes arranged in horizontal layers by dependency depth. Barycenter heuristic minimizes edge crossings. Directory clustering keeps related files together.</a:t>
+            </a:r>
+          </a:p>
+        </p:txBody>
+      </p:sp>
+      <p:sp>
+        <p:nvSpPr>
+          <p:cNvPr id="9" name="Rectangle 8"/>
+          <p:cNvSpPr/>
+          <p:nvPr/>
+        </p:nvSpPr>
+        <p:spPr>
+          <a:xfrm>
+            <a:off x="5257800" y="2606040"/>
+            <a:ext cx="73152" cy="914400"/>
+          </a:xfrm>
+          <a:prstGeom prst="rect">
+            <a:avLst/>
+          </a:prstGeom>
+          <a:solidFill>
+            <a:srgbClr val="8B5CF6"/>
+          </a:solidFill>
+          <a:ln>
+            <a:noFill/>
+          </a:ln>
+        </p:spPr>
+        <p:style>
+          <a:lnRef idx="1">
+            <a:schemeClr val="accent1"/>
+          </a:lnRef>
+          <a:fillRef idx="3">
+            <a:schemeClr val="accent1"/>
+          </a:fillRef>
+          <a:effectRef idx="2">
+            <a:schemeClr val="accent1"/>
+          </a:effectRef>
+          <a:fontRef idx="minor">
+            <a:schemeClr val="lt1"/>
+          </a:fontRef>
+        </p:style>
+        <p:txBody>
+          <a:bodyPr rtlCol="0" anchor="ctr"/>
+          <a:lstStyle/>
+          <a:p>
+            <a:pPr algn="ctr"/>
+          </a:p>
+        </p:txBody>
+      </p:sp>
+      <p:sp>
+        <p:nvSpPr>
+          <p:cNvPr id="10" name="TextBox 9"/>
+          <p:cNvSpPr txBox="1"/>
+          <p:nvPr/>
+        </p:nvSpPr>
+        <p:spPr>
+          <a:xfrm>
+            <a:off x="5486400" y="2624328"/>
+            <a:ext cx="3200400" cy="274320"/>
+          </a:xfrm>
+          <a:prstGeom prst="rect">
+            <a:avLst/>
+          </a:prstGeom>
+          <a:noFill/>
+        </p:spPr>
+        <p:txBody>
+          <a:bodyPr wrap="square"/>
+          <a:lstStyle/>
+          <a:p>
+            <a:pPr algn="l">
+              <a:defRPr sz="1300" b="1">
+                <a:solidFill>
+                  <a:srgbClr val="F8FAFC"/>
+                </a:solidFill>
+                <a:latin typeface="Calibri"/>
+              </a:defRPr>
+            </a:pPr>
+            <a:r>
+              <a:t>Violation Detection</a:t>
+            </a:r>
+          </a:p>
+        </p:txBody>
+      </p:sp>
+      <p:sp>
+        <p:nvSpPr>
+          <p:cNvPr id="11" name="TextBox 10"/>
+          <p:cNvSpPr txBox="1"/>
+          <p:nvPr/>
+        </p:nvSpPr>
+        <p:spPr>
+          <a:xfrm>
+            <a:off x="5486400" y="2944368"/>
+            <a:ext cx="3200400" cy="594360"/>
+          </a:xfrm>
+          <a:prstGeom prst="rect">
+            <a:avLst/>
+          </a:prstGeom>
+          <a:noFill/>
+        </p:spPr>
+        <p:txBody>
+          <a:bodyPr wrap="square"/>
+          <a:lstStyle/>
+          <a:p>
+            <a:pPr algn="l">
+              <a:defRPr sz="1050" b="0">
+                <a:solidFill>
+                  <a:srgbClr val="BDC5D0"/>
+                </a:solidFill>
+                <a:latin typeface="Calibri"/>
+              </a:defRPr>
+            </a:pPr>
+            <a:r>
+              <a:t>Imports pointing upward (deeper file importing shallower) are flagged with pulsing amber dashed edges. Worst offenders shown in sidebar.</a:t>
+            </a:r>
+          </a:p>
+        </p:txBody>
+      </p:sp>
+      <p:sp>
+        <p:nvSpPr>
+          <p:cNvPr id="12" name="Rectangle 11"/>
+          <p:cNvSpPr/>
+          <p:nvPr/>
+        </p:nvSpPr>
+        <p:spPr>
+          <a:xfrm>
+            <a:off x="5257800" y="3794760"/>
+            <a:ext cx="73152" cy="914400"/>
+          </a:xfrm>
+          <a:prstGeom prst="rect">
+            <a:avLst/>
+          </a:prstGeom>
+          <a:solidFill>
+            <a:srgbClr val="10B981"/>
+          </a:solidFill>
+          <a:ln>
+            <a:noFill/>
+          </a:ln>
+        </p:spPr>
+        <p:style>
+          <a:lnRef idx="1">
+            <a:schemeClr val="accent1"/>
+          </a:lnRef>
+          <a:fillRef idx="3">
+            <a:schemeClr val="accent1"/>
+          </a:fillRef>
+          <a:effectRef idx="2">
+            <a:schemeClr val="accent1"/>
+          </a:effectRef>
+          <a:fontRef idx="minor">
+            <a:schemeClr val="lt1"/>
+          </a:fontRef>
+        </p:style>
+        <p:txBody>
+          <a:bodyPr rtlCol="0" anchor="ctr"/>
+          <a:lstStyle/>
+          <a:p>
+            <a:pPr algn="ctr"/>
+          </a:p>
+        </p:txBody>
+      </p:sp>
+      <p:sp>
+        <p:nvSpPr>
+          <p:cNvPr id="13" name="TextBox 12"/>
+          <p:cNvSpPr txBox="1"/>
+          <p:nvPr/>
+        </p:nvSpPr>
+        <p:spPr>
+          <a:xfrm>
+            <a:off x="5486400" y="3813048"/>
+            <a:ext cx="3200400" cy="274320"/>
+          </a:xfrm>
+          <a:prstGeom prst="rect">
+            <a:avLst/>
+          </a:prstGeom>
+          <a:noFill/>
+        </p:spPr>
+        <p:txBody>
+          <a:bodyPr wrap="square"/>
+          <a:lstStyle/>
+          <a:p>
+            <a:pPr algn="l">
+              <a:defRPr sz="1300" b="1">
+                <a:solidFill>
+                  <a:srgbClr val="F8FAFC"/>
+                </a:solidFill>
+                <a:latin typeface="Calibri"/>
+              </a:defRPr>
+            </a:pPr>
+            <a:r>
+              <a:t>Drag-to-Reassign</a:t>
+            </a:r>
+          </a:p>
+        </p:txBody>
+      </p:sp>
+      <p:sp>
+        <p:nvSpPr>
+          <p:cNvPr id="14" name="TextBox 13"/>
+          <p:cNvSpPr txBox="1"/>
+          <p:nvPr/>
+        </p:nvSpPr>
+        <p:spPr>
+          <a:xfrm>
+            <a:off x="5486400" y="4133088"/>
+            <a:ext cx="3200400" cy="594360"/>
+          </a:xfrm>
+          <a:prstGeom prst="rect">
+            <a:avLst/>
+          </a:prstGeom>
+          <a:noFill/>
+        </p:spPr>
+        <p:txBody>
+          <a:bodyPr wrap="square"/>
+          <a:lstStyle/>
+          <a:p>
+            <a:pPr algn="l">
+              <a:defRPr sz="1050" b="0">
+                <a:solidFill>
+                  <a:srgbClr val="BDC5D0"/>
+                </a:solidFill>
+                <a:latin typeface="Calibri"/>
+              </a:defRPr>
+            </a:pPr>
+            <a:r>
+              <a:t>Drag nodes between layers to simulate architectural changes. Per-file overrides with instant re-layout and violation recalculation.</a:t>
+            </a:r>
+          </a:p>
+        </p:txBody>
+      </p:sp>
+    </p:spTree>
+  </p:cSld>
+  <p:clrMapOvr>
+    <a:masterClrMapping/>
+  </p:clrMapOvr>
+</p:sld>
+</file>
+
 <file path=ppt/slides/slide2.xml><?xml version="1.0" encoding="utf-8"?>
 <p:sld xmlns:a="http://schemas.openxmlformats.org/drawingml/2006/main" xmlns:p="http://schemas.openxmlformats.org/presentationml/2006/main" xmlns:r="http://schemas.openxmlformats.org/officeDocument/2006/relationships">
   <p:cSld>
@@ -6398,7 +7054,7 @@
               </a:defRPr>
             </a:pPr>
             <a:r>
-              <a:t>Two Powerful Views</a:t>
+              <a:t>Three Powerful Views</a:t>
             </a:r>
           </a:p>
         </p:txBody>
@@ -6432,7 +7088,7 @@
               </a:defRPr>
             </a:pPr>
             <a:r>
-              <a:t>Interactive force-directed graph and dependency tree explorer</a:t>
+              <a:t>Graph, dependency tree, and layered architecture explorer</a:t>
             </a:r>
           </a:p>
         </p:txBody>
@@ -7098,7 +7754,7 @@
               </a:defRPr>
             </a:pPr>
             <a:r>
-              <a:t>Sidebar views, blast radius, cycle detection from your editor</a:t>
+              <a:t>Graph, tree, and layers views with full analysis from your editor</a:t>
             </a:r>
           </a:p>
         </p:txBody>
@@ -7209,7 +7865,7 @@
               </a:defRPr>
             </a:pPr>
             <a:r>
-              <a:t>Simulation, merge/split, story mode, layering rules</a:t>
+              <a:t>Simulation, merge/split, story mode, guided tour, timeline</a:t>
             </a:r>
           </a:p>
         </p:txBody>
@@ -7736,7 +8392,7 @@
               </a:defRPr>
             </a:pPr>
             <a:r>
-              <a:t>index.html + 13 JS modules + style.css</a:t>
+              <a:t>index.html + 14 JS modules + style.css</a:t>
             </a:r>
           </a:p>
         </p:txBody>
@@ -7776,7 +8432,7 @@
                 </a:solidFill>
                 <a:latin typeface="Calibri"/>
               </a:rPr>
-              <a:t>13-module SPA with floating UI panels</a:t>
+              <a:t>14-module SPA with floating UI panels</a:t>
             </a:r>
           </a:p>
           <a:p>
@@ -7793,7 +8449,7 @@
                 </a:solidFill>
                 <a:latin typeface="Calibri"/>
               </a:rPr>
-              <a:t>Two views: graph and tree</a:t>
+              <a:t>Three views: graph, tree, and layers</a:t>
             </a:r>
           </a:p>
           <a:p>
@@ -11619,7 +12275,7 @@
               </a:defRPr>
             </a:pPr>
             <a:r>
-              <a:t>CYTOSCAPE.JS + FORCE LAYOUT + TWO VIEWS</a:t>
+              <a:t>CYTOSCAPE.JS + FORCE LAYOUT + THREE VIEWS</a:t>
             </a:r>
           </a:p>
         </p:txBody>
@@ -12180,7 +12836,7 @@
               </a:defRPr>
             </a:pPr>
             <a:r>
-              <a:t>Battle-tested graph library. Two views: interactive graph and dependency tree.</a:t>
+              <a:t>Battle-tested graph library. Three views: graph, dependency tree, and layered architecture.</a:t>
             </a:r>
           </a:p>
         </p:txBody>
@@ -12368,7 +13024,7 @@
               </a:defRPr>
             </a:pPr>
             <a:r>
-              <a:t>13-Module SPA</a:t>
+              <a:t>14-Module SPA</a:t>
             </a:r>
           </a:p>
         </p:txBody>
@@ -12402,7 +13058,7 @@
               </a:defRPr>
             </a:pPr>
             <a:r>
-              <a:t>graph-core, views, ui, tools, analysis, exports, query, simulation, story, state, tour, timeline, app. CDN: Cytoscape, dagre, Prism.js, Inter font.</a:t>
+              <a:t>graph-core, views, ui, tools, analysis, exports, query, simulation, story, state, tour, timeline, layers, app. CDN: Cytoscape, dagre, Prism.js, Inter font.</a:t>
             </a:r>
           </a:p>
         </p:txBody>

--- a/DepGraph.pptx
+++ b/DepGraph.pptx
@@ -3671,7 +3671,7 @@
               </a:defRPr>
             </a:pPr>
             <a:r>
-              <a:t>Even with 11 endpoints, Flask’s minimal surface keeps the server lean — no ORM, no migrations, no config layer.</a:t>
+              <a:t>Even with 13 endpoints (plus 2 dev-only), Flask’s minimal surface keeps the server lean — no ORM, no migrations, no config layer.</a:t>
             </a:r>
           </a:p>
         </p:txBody>
@@ -13747,7 +13747,7 @@
               </a:defRPr>
             </a:pPr>
             <a:r>
-              <a:t>/api/detect  /api/file  /api/diff  /api/layers  /api/rules  /api/simulate  /api/simulate-merge  /api/story  /api/config  /api/csrf-token</a:t>
+              <a:t>/api/detect  /api/file  /api/diff  /api/layers  /api/rules  /api/simulate  /api/simulate-merge  /api/github  /api/story  /api/config  /api/csrf-token   ·   dev-only: /api/churn, /api/churn-remote</a:t>
             </a:r>
           </a:p>
         </p:txBody>
